--- a/Schools_ML_Track/camp_2026/slides/ML/ML22.pptx
+++ b/Schools_ML_Track/camp_2026/slides/ML/ML22.pptx
@@ -127,7 +127,7 @@
   <p:extLst>
     <p:ext uri="{521415D9-36F7-43E2-AB2F-B90AF26B5E84}">
       <p14:sectionLst xmlns:p14="http://schemas.microsoft.com/office/powerpoint/2010/main">
-        <p14:section name="Opening" id="{63a51ba3-3a02-d8db-feec-49b328ec1b8f}">
+        <p14:section name="Opening" id="{381dc1da-080d-4fcd-4651-6aa8701d4ad9}">
           <p14:sldIdLst>
             <p14:sldId id="256"/>
             <p14:sldId id="257"/>
@@ -137,7 +137,7 @@
             <p14:sldId id="261"/>
           </p14:sldIdLst>
         </p14:section>
-        <p14:section name="Block A" id="{74f5ba12-7253-9bc6-ca8f-cd2855e5c57c}">
+        <p14:section name="Block A" id="{5b298d48-e0fc-7041-b8ca-2afc2549b79c}">
           <p14:sldIdLst>
             <p14:sldId id="262"/>
             <p14:sldId id="263"/>
@@ -146,15 +146,15 @@
             <p14:sldId id="267"/>
           </p14:sldIdLst>
         </p14:section>
-        <p14:section name="Break" id="{fa91aaef-2ca2-29c2-8d01-f365c833b541}">
+        <p14:section name="Break" id="{430795f6-b7eb-d3ae-3adb-90151d456846}">
           <p14:sldIdLst>
             <p14:sldId id="266"/>
           </p14:sldIdLst>
         </p14:section>
-        <p14:section name="Block A" id="{e024a2d5-ecf3-70fb-f49f-d551822b5fba}">
+        <p14:section name="Block A" id="{fc056d08-725f-1a78-13c1-4b61a07db167}">
           <p14:sldIdLst/>
         </p14:section>
-        <p14:section name="Block B" id="{eabbca47-31a2-337c-ae22-68c2b70b4efa}">
+        <p14:section name="Block B" id="{c42859ca-c2a9-0206-65e3-c8bd76723c7e}">
           <p14:sldIdLst>
             <p14:sldId id="268"/>
             <p14:sldId id="269"/>
@@ -164,7 +164,7 @@
             <p14:sldId id="273"/>
           </p14:sldIdLst>
         </p14:section>
-        <p14:section name="Make and close" id="{dbc4c201-4da4-376c-9719-b2902865a859}">
+        <p14:section name="Make and close" id="{7fe1b9ff-71b1-f0d5-06a9-f8911aa6b9cf}">
           <p14:sldIdLst>
             <p14:sldId id="274"/>
             <p14:sldId id="275"/>

--- a/Schools_ML_Track/camp_2026/slides/ML/ML22.pptx
+++ b/Schools_ML_Track/camp_2026/slides/ML/ML22.pptx
@@ -127,7 +127,7 @@
   <p:extLst>
     <p:ext uri="{521415D9-36F7-43E2-AB2F-B90AF26B5E84}">
       <p14:sectionLst xmlns:p14="http://schemas.microsoft.com/office/powerpoint/2010/main">
-        <p14:section name="Opening" id="{381dc1da-080d-4fcd-4651-6aa8701d4ad9}">
+        <p14:section name="Opening" id="{fd420b6c-eb68-eaf6-99d9-c9b1dc532c9a}">
           <p14:sldIdLst>
             <p14:sldId id="256"/>
             <p14:sldId id="257"/>
@@ -137,7 +137,7 @@
             <p14:sldId id="261"/>
           </p14:sldIdLst>
         </p14:section>
-        <p14:section name="Block A" id="{5b298d48-e0fc-7041-b8ca-2afc2549b79c}">
+        <p14:section name="Block A" id="{003e169a-9a4e-7234-93f9-739d5c4190e7}">
           <p14:sldIdLst>
             <p14:sldId id="262"/>
             <p14:sldId id="263"/>
@@ -146,15 +146,15 @@
             <p14:sldId id="267"/>
           </p14:sldIdLst>
         </p14:section>
-        <p14:section name="Break" id="{430795f6-b7eb-d3ae-3adb-90151d456846}">
+        <p14:section name="Break" id="{4e937bb6-bdd3-b39b-4ca3-57197b44b16d}">
           <p14:sldIdLst>
             <p14:sldId id="266"/>
           </p14:sldIdLst>
         </p14:section>
-        <p14:section name="Block A" id="{fc056d08-725f-1a78-13c1-4b61a07db167}">
+        <p14:section name="Block A" id="{082835d9-6a5e-7bd7-45f1-87628d5227e9}">
           <p14:sldIdLst/>
         </p14:section>
-        <p14:section name="Block B" id="{c42859ca-c2a9-0206-65e3-c8bd76723c7e}">
+        <p14:section name="Block B" id="{0461d98e-f91f-0877-4be6-beb5487a746b}">
           <p14:sldIdLst>
             <p14:sldId id="268"/>
             <p14:sldId id="269"/>
@@ -164,7 +164,7 @@
             <p14:sldId id="273"/>
           </p14:sldIdLst>
         </p14:section>
-        <p14:section name="Make and close" id="{7fe1b9ff-71b1-f0d5-06a9-f8911aa6b9cf}">
+        <p14:section name="Make and close" id="{291b317b-4995-2f07-3b6f-7ebf9b590c16}">
           <p14:sldIdLst>
             <p14:sldId id="274"/>
             <p14:sldId id="275"/>
@@ -3104,7 +3104,24 @@
                 <a:ea typeface="Lato" pitchFamily="34" charset="-122"/>
                 <a:cs typeface="Lato" pitchFamily="34" charset="-120"/>
               </a:rPr>
-              <a:t>The final test and a reproducible handover</a:t>
+              <a:t>The final test and a</a:t>
+            </a:r>
+            <a:endParaRPr lang="en-US" sz="5600" dirty="0"/>
+          </a:p>
+          <a:p>
+            <a:pPr algn="l" indent="0" marL="0">
+              <a:buNone/>
+            </a:pPr>
+            <a:r>
+              <a:rPr lang="en-US" sz="5600" b="1" dirty="0">
+                <a:solidFill>
+                  <a:srgbClr val="FFFFFF"/>
+                </a:solidFill>
+                <a:latin typeface="Lato" pitchFamily="34" charset="0"/>
+                <a:ea typeface="Lato" pitchFamily="34" charset="-122"/>
+                <a:cs typeface="Lato" pitchFamily="34" charset="-120"/>
+              </a:rPr>
+              <a:t>reproducible handover</a:t>
             </a:r>
             <a:endParaRPr lang="en-US" sz="5600" dirty="0"/>
           </a:p>
@@ -5122,15 +5139,15 @@
           <a:p>
             <a:pPr algn="l" indent="0" marL="0">
               <a:lnSpc>
-                <a:spcPts val="3600"/>
+                <a:spcPts val="3360"/>
               </a:lnSpc>
               <a:spcAft>
-                <a:spcPts val="2520"/>
+                <a:spcPts val="2020"/>
               </a:spcAft>
               <a:buNone/>
             </a:pPr>
             <a:r>
-              <a:rPr lang="en-US" sz="3000" dirty="0">
+              <a:rPr lang="en-US" sz="2800" dirty="0">
                 <a:solidFill>
                   <a:srgbClr val="111111"/>
                 </a:solidFill>
@@ -5138,22 +5155,68 @@
                 <a:ea typeface="Lato" pitchFamily="34" charset="-122"/>
                 <a:cs typeface="Lato" pitchFamily="34" charset="-120"/>
               </a:rPr>
-              <a:t>Use the project checklist. Reopen all submitted files. Submit project.ipynb, your data dictionary and report.pdf or report.docx together through the instructor's collection route.</a:t>
-            </a:r>
-            <a:endParaRPr lang="en-US" sz="3000" dirty="0"/>
+              <a:t>Use the project checklist.</a:t>
+            </a:r>
+            <a:endParaRPr lang="en-US" sz="2800" dirty="0"/>
           </a:p>
           <a:p>
             <a:pPr algn="l" indent="0" marL="0">
               <a:lnSpc>
-                <a:spcPts val="3600"/>
+                <a:spcPts val="3360"/>
               </a:lnSpc>
               <a:spcAft>
-                <a:spcPts val="2520"/>
+                <a:spcPts val="2020"/>
               </a:spcAft>
               <a:buNone/>
             </a:pPr>
             <a:r>
-              <a:rPr lang="en-US" sz="3000" dirty="0">
+              <a:rPr lang="en-US" sz="2800" dirty="0">
+                <a:solidFill>
+                  <a:srgbClr val="111111"/>
+                </a:solidFill>
+                <a:latin typeface="Lato" pitchFamily="34" charset="0"/>
+                <a:ea typeface="Lato" pitchFamily="34" charset="-122"/>
+                <a:cs typeface="Lato" pitchFamily="34" charset="-120"/>
+              </a:rPr>
+              <a:t>Reopen all submitted files.</a:t>
+            </a:r>
+            <a:endParaRPr lang="en-US" sz="2800" dirty="0"/>
+          </a:p>
+          <a:p>
+            <a:pPr algn="l" indent="0" marL="0">
+              <a:lnSpc>
+                <a:spcPts val="3360"/>
+              </a:lnSpc>
+              <a:spcAft>
+                <a:spcPts val="2020"/>
+              </a:spcAft>
+              <a:buNone/>
+            </a:pPr>
+            <a:r>
+              <a:rPr lang="en-US" sz="2800" dirty="0">
+                <a:solidFill>
+                  <a:srgbClr val="111111"/>
+                </a:solidFill>
+                <a:latin typeface="Lato" pitchFamily="34" charset="0"/>
+                <a:ea typeface="Lato" pitchFamily="34" charset="-122"/>
+                <a:cs typeface="Lato" pitchFamily="34" charset="-120"/>
+              </a:rPr>
+              <a:t>Submit project.ipynb, your data dictionary and report.pdf or report.docx together through the instructor's collection route.</a:t>
+            </a:r>
+            <a:endParaRPr lang="en-US" sz="2800" dirty="0"/>
+          </a:p>
+          <a:p>
+            <a:pPr algn="l" indent="0" marL="0">
+              <a:lnSpc>
+                <a:spcPts val="3360"/>
+              </a:lnSpc>
+              <a:spcAft>
+                <a:spcPts val="2020"/>
+              </a:spcAft>
+              <a:buNone/>
+            </a:pPr>
+            <a:r>
+              <a:rPr lang="en-US" sz="2800" dirty="0">
                 <a:solidFill>
                   <a:srgbClr val="111111"/>
                 </a:solidFill>
@@ -5163,7 +5226,7 @@
               </a:rPr>
               <a:t>Save it as ML22. Write two sentences: what you changed and how you checked it.</a:t>
             </a:r>
-            <a:endParaRPr lang="en-US" sz="3000" dirty="0"/>
+            <a:endParaRPr lang="en-US" sz="2800" dirty="0"/>
           </a:p>
         </p:txBody>
       </p:sp>
